--- a/classes/parte-15-seguridad-de-ia-y-machine-learning/291-introduccion-a-la-seguridad-de-ia-y-ml/clase-291-presentacion.pptx
+++ b/classes/parte-15-seguridad-de-ia-y-machine-learning/291-introduccion-a-la-seguridad-de-ia-y-ml/clase-291-presentacion.pptx
@@ -17,6 +17,10 @@
     <p:sldId id="265" r:id="rId16"/>
     <p:sldId id="266" r:id="rId17"/>
     <p:sldId id="267" r:id="rId18"/>
+    <p:sldId id="268" r:id="rId19"/>
+    <p:sldId id="269" r:id="rId20"/>
+    <p:sldId id="270" r:id="rId21"/>
+    <p:sldId id="271" r:id="rId22"/>
   </p:sldIdLst>
   <p:sldSz cx="9144000" cy="6858000" type="screen4x3"/>
   <p:notesSz cx="6858000" cy="9144000"/>
@@ -3198,7 +3202,7 @@
                   <a:srgbClr val="0B3D2E"/>
                 </a:solidFill>
               </a:rPr>
-              <a:t>⚠️ Errores comunes</a:t>
+              <a:t>🧪 Laboratorio guiado</a:t>
             </a:r>
           </a:p>
         </p:txBody>
@@ -3236,67 +3240,97 @@
                   <a:srgbClr val="22282E"/>
                 </a:solidFill>
               </a:rPr>
-              <a:t>•  "Mi modelo es seguro porque tiene buena accuracy" — Accuracy ≠ robustez. Mide desempeño bajo ataque, no solo en test limpio.</a:t>
-            </a:r>
-          </a:p>
-          <a:p>
-            <a:pPr>
-              <a:spcAft>
-                <a:spcPts val="600"/>
-              </a:spcAft>
-            </a:pPr>
-            <a:r>
-              <a:rPr sz="1500">
-                <a:solidFill>
-                  <a:srgbClr val="22282E"/>
-                </a:solidFill>
-              </a:rPr>
-              <a:t>•  Tratar la IA como software normal en el threat model — Faltan datos y entrenamiento como activos. Modela el ciclo de vida completo, no solo la API.</a:t>
-            </a:r>
-          </a:p>
-          <a:p>
-            <a:pPr>
-              <a:spcAft>
-                <a:spcPts val="600"/>
-              </a:spcAft>
-            </a:pPr>
-            <a:r>
-              <a:rPr sz="1500">
-                <a:solidFill>
-                  <a:srgbClr val="22282E"/>
-                </a:solidFill>
-              </a:rPr>
-              <a:t>•  Ignorar la cadena de suministro — Datasets/modelos de terceros heredan puertas traseras. Añade un AI-BOM.</a:t>
-            </a:r>
-          </a:p>
-          <a:p>
-            <a:pPr>
-              <a:spcAft>
-                <a:spcPts val="600"/>
-              </a:spcAft>
-            </a:pPr>
-            <a:r>
-              <a:rPr sz="1500">
-                <a:solidFill>
-                  <a:srgbClr val="22282E"/>
-                </a:solidFill>
-              </a:rPr>
-              <a:t>•  Confundir caja blanca y negra — Suponer acceso a gradientes que no existe. Define primero el nivel de acceso del atacante.</a:t>
-            </a:r>
-          </a:p>
-          <a:p>
-            <a:pPr>
-              <a:spcAft>
-                <a:spcPts val="600"/>
-              </a:spcAft>
-            </a:pPr>
-            <a:r>
-              <a:rPr sz="1500">
-                <a:solidFill>
-                  <a:srgbClr val="22282E"/>
-                </a:solidFill>
-              </a:rPr>
-              <a:t>•  Usar solo un marco — ATLAS describe amenazas; NIST AI RMF gestiona riesgo. Se complementan, no compiten.</a:t>
+              <a:t>•  Este laboratorio es de modelado, no de explotación; aún así, cualquier prueba se hace sobre modelos y datos propios.</a:t>
+            </a:r>
+          </a:p>
+          <a:p>
+            <a:pPr>
+              <a:spcAft>
+                <a:spcPts val="600"/>
+              </a:spcAft>
+            </a:pPr>
+            <a:r>
+              <a:rPr sz="1500">
+                <a:solidFill>
+                  <a:srgbClr val="22282E"/>
+                </a:solidFill>
+              </a:rPr>
+              <a:t>•  Elige un sistema de referencia. Toma un caso realista, p. ej. "API de scoring de crédito basada en un modelo de scikit-learn" o "chatbot de soporte con un LLM". Descríbelo en una frase.</a:t>
+            </a:r>
+          </a:p>
+          <a:p>
+            <a:pPr>
+              <a:spcAft>
+                <a:spcPts val="600"/>
+              </a:spcAft>
+            </a:pPr>
+            <a:r>
+              <a:rPr sz="1500">
+                <a:solidFill>
+                  <a:srgbClr val="22282E"/>
+                </a:solidFill>
+              </a:rPr>
+              <a:t>•  Dibuja el ciclo de vida. En un diagrama, enumera las cinco fases: recolección de datos, entrenamiento, empaquetado del modelo, despliegue (API), inferencia. Para cada una, anota una entrada de datos…</a:t>
+            </a:r>
+          </a:p>
+          <a:p>
+            <a:pPr>
+              <a:spcAft>
+                <a:spcPts val="600"/>
+              </a:spcAft>
+            </a:pPr>
+            <a:r>
+              <a:rPr sz="1500">
+                <a:solidFill>
+                  <a:srgbClr val="22282E"/>
+                </a:solidFill>
+              </a:rPr>
+              <a:t>•  Enumera activos y propiedades CIA. Por cada activo (dataset, pesos del modelo, API, prompts del sistema) marca qué te importa: confidencialidad (¿se puede robar el modelo?), integridad (¿se puede…</a:t>
+            </a:r>
+          </a:p>
+          <a:p>
+            <a:pPr>
+              <a:spcAft>
+                <a:spcPts val="600"/>
+              </a:spcAft>
+            </a:pPr>
+            <a:r>
+              <a:rPr sz="1500">
+                <a:solidFill>
+                  <a:srgbClr val="22282E"/>
+                </a:solidFill>
+              </a:rPr>
+              <a:t>•  Mapea a MITRE ATLAS. Abre el Navigator y localiza técnicas aplicables: por ejemplo "Evade ML Model", "Poison Training Data", "Exfiltrate via ML Inference API". Anota los IDs.</a:t>
+            </a:r>
+          </a:p>
+          <a:p>
+            <a:pPr>
+              <a:spcAft>
+                <a:spcPts val="600"/>
+              </a:spcAft>
+            </a:pPr>
+            <a:r>
+              <a:rPr sz="1500">
+                <a:solidFill>
+                  <a:srgbClr val="22282E"/>
+                </a:solidFill>
+              </a:rPr>
+              <a:t>•  Clasifica al atacante. Para cada amenaza, decide si requiere caja blanca o negra y qué nivel de acceso (usuario de la API, insider del pipeline, proveedor del dataset).</a:t>
+            </a:r>
+          </a:p>
+          <a:p>
+            <a:pPr>
+              <a:spcAft>
+                <a:spcPts val="600"/>
+              </a:spcAft>
+            </a:pPr>
+            <a:r>
+              <a:rPr sz="1500">
+                <a:solidFill>
+                  <a:srgbClr val="22282E"/>
+                </a:solidFill>
+              </a:rPr>
+              <a:t>•  Cruza con NIST AI RMF. Asigna cada riesgo a una función: Map (identificar contexto), Measure (métrica de robustez), Manage (control/mitigación), Govern (política/rol responsable).</a:t>
             </a:r>
           </a:p>
         </p:txBody>
@@ -3347,7 +3381,7 @@
                   <a:srgbClr val="0B3D2E"/>
                 </a:solidFill>
               </a:rPr>
-              <a:t>❓ Preguntas frecuentes</a:t>
+              <a:t>✍️ Ejercicios</a:t>
             </a:r>
           </a:p>
         </p:txBody>
@@ -3385,97 +3419,82 @@
                   <a:srgbClr val="22282E"/>
                 </a:solidFill>
               </a:rPr>
-              <a:t>•  ❓ ¿En qué se diferencia la seguridad de IA de la seguridad de software tradicional?</a:t>
-            </a:r>
-          </a:p>
-          <a:p>
-            <a:pPr>
-              <a:spcAft>
-                <a:spcPts val="600"/>
-              </a:spcAft>
-            </a:pPr>
-            <a:r>
-              <a:rPr sz="1500">
-                <a:solidFill>
-                  <a:srgbClr val="22282E"/>
-                </a:solidFill>
-              </a:rPr>
-              <a:t>•  Añade dos activos nuevos —los datos de entrenamiento y el modelo aprendido— y ataques que explotan el comportamiento estadístico del modelo, no bugs de código. El pipeline de datos pasa a ser código de facto.</a:t>
-            </a:r>
-          </a:p>
-          <a:p>
-            <a:pPr>
-              <a:spcAft>
-                <a:spcPts val="600"/>
-              </a:spcAft>
-            </a:pPr>
-            <a:r>
-              <a:rPr sz="1500">
-                <a:solidFill>
-                  <a:srgbClr val="22282E"/>
-                </a:solidFill>
-              </a:rPr>
-              <a:t>•  ❓ ¿MITRE ATLAS reemplaza a ATT&amp;CK?</a:t>
-            </a:r>
-          </a:p>
-          <a:p>
-            <a:pPr>
-              <a:spcAft>
-                <a:spcPts val="600"/>
-              </a:spcAft>
-            </a:pPr>
-            <a:r>
-              <a:rPr sz="1500">
-                <a:solidFill>
-                  <a:srgbClr val="22282E"/>
-                </a:solidFill>
-              </a:rPr>
-              <a:t>•  No. ATLAS es un complemento centrado en sistemas de IA; muchas cadenas reales combinan técnicas de ATT&amp;CK (acceso inicial) con técnicas de ATLAS (evasión o envenenamiento del modelo).</a:t>
-            </a:r>
-          </a:p>
-          <a:p>
-            <a:pPr>
-              <a:spcAft>
-                <a:spcPts val="600"/>
-              </a:spcAft>
-            </a:pPr>
-            <a:r>
-              <a:rPr sz="1500">
-                <a:solidFill>
-                  <a:srgbClr val="22282E"/>
-                </a:solidFill>
-              </a:rPr>
-              <a:t>•  ❓ ¿Necesito ser experto en ML para hacer seguridad de IA?</a:t>
-            </a:r>
-          </a:p>
-          <a:p>
-            <a:pPr>
-              <a:spcAft>
-                <a:spcPts val="600"/>
-              </a:spcAft>
-            </a:pPr>
-            <a:r>
-              <a:rPr sz="1500">
-                <a:solidFill>
-                  <a:srgbClr val="22282E"/>
-                </a:solidFill>
-              </a:rPr>
-              <a:t>•  Ayuda, pero no es imprescindible al inicio. Muchos ataques a LLM son de caja negra y se parecen a AppSec. Los ataques adversariales sí requieren entender gradientes y entrenamiento.</a:t>
-            </a:r>
-          </a:p>
-          <a:p>
-            <a:pPr>
-              <a:spcAft>
-                <a:spcPts val="600"/>
-              </a:spcAft>
-            </a:pPr>
-            <a:r>
-              <a:rPr sz="1500">
-                <a:solidFill>
-                  <a:srgbClr val="22282E"/>
-                </a:solidFill>
-              </a:rPr>
-              <a:t>•  ❓ ¿El NIST AI RMF es obligatorio?</a:t>
+              <a:t>•  Para un filtro de spam, lista tres ataques distintos y ubícalos en el ciclo de vida.</a:t>
+            </a:r>
+          </a:p>
+          <a:p>
+            <a:pPr>
+              <a:spcAft>
+                <a:spcPts val="600"/>
+              </a:spcAft>
+            </a:pPr>
+            <a:r>
+              <a:rPr sz="1500">
+                <a:solidFill>
+                  <a:srgbClr val="22282E"/>
+                </a:solidFill>
+              </a:rPr>
+              <a:t>•  Explica con un ejemplo por qué la transferibilidad hace peligrosos los ataques de caja negra.</a:t>
+            </a:r>
+          </a:p>
+          <a:p>
+            <a:pPr>
+              <a:spcAft>
+                <a:spcPts val="600"/>
+              </a:spcAft>
+            </a:pPr>
+            <a:r>
+              <a:rPr sz="1500">
+                <a:solidFill>
+                  <a:srgbClr val="22282E"/>
+                </a:solidFill>
+              </a:rPr>
+              <a:t>•  Localiza en ATLAS un caso de estudio real (case study) y resume su cadena de ataque en 4 pasos.</a:t>
+            </a:r>
+          </a:p>
+          <a:p>
+            <a:pPr>
+              <a:spcAft>
+                <a:spcPts val="600"/>
+              </a:spcAft>
+            </a:pPr>
+            <a:r>
+              <a:rPr sz="1500">
+                <a:solidFill>
+                  <a:srgbClr val="22282E"/>
+                </a:solidFill>
+              </a:rPr>
+              <a:t>•  Redacta, para el caso "chatbot con LLM", una entrada de riesgo con las cuatro funciones del AI RMF cubiertas.</a:t>
+            </a:r>
+          </a:p>
+          <a:p>
+            <a:pPr>
+              <a:spcAft>
+                <a:spcPts val="600"/>
+              </a:spcAft>
+            </a:pPr>
+            <a:r>
+              <a:rPr sz="1500">
+                <a:solidFill>
+                  <a:srgbClr val="22282E"/>
+                </a:solidFill>
+              </a:rPr>
+              <a:t>•  Construye un AI-BOM mínimo (5 filas) para un modelo que usa un dataset público y un modelo preentrenado de Hugging Face.</a:t>
+            </a:r>
+          </a:p>
+          <a:p>
+            <a:pPr>
+              <a:spcAft>
+                <a:spcPts val="600"/>
+              </a:spcAft>
+            </a:pPr>
+            <a:r>
+              <a:rPr sz="1500">
+                <a:solidFill>
+                  <a:srgbClr val="22282E"/>
+                </a:solidFill>
+              </a:rPr>
+              <a:t>•  Diferencia con ejemplos "robustez", "seguridad" y "safety" para un coche autónomo.</a:t>
             </a:r>
           </a:p>
         </p:txBody>
@@ -3526,7 +3545,7 @@
                   <a:srgbClr val="0B3D2E"/>
                 </a:solidFill>
               </a:rPr>
-              <a:t>🔗 Referencias</a:t>
+              <a:t>📝 Reto verificable</a:t>
             </a:r>
           </a:p>
         </p:txBody>
@@ -3564,6 +3583,438 @@
                   <a:srgbClr val="22282E"/>
                 </a:solidFill>
               </a:rPr>
+              <a:t>•  Entrega un modelo de amenazas de una página para un sistema de ML a tu elección que incluya: diagrama del ciclo de vida, tabla de activos con propiedades CIA, al menos 6 amenazas mapeadas a técnicas…</a:t>
+            </a:r>
+          </a:p>
+          <a:p>
+            <a:pPr>
+              <a:spcAft>
+                <a:spcPts val="600"/>
+              </a:spcAft>
+            </a:pPr>
+            <a:r>
+              <a:rPr sz="1500">
+                <a:solidFill>
+                  <a:srgbClr val="22282E"/>
+                </a:solidFill>
+              </a:rPr>
+              <a:t>•  Criterio de aceptación: cada una de las 6 amenazas tiene (a) un ID ATLAS válido, (b) la fase del ciclo de vida afectada, (c) el tipo de atacante y (d) una función del NIST AI RMF asociada. Un revisor…</a:t>
+            </a:r>
+          </a:p>
+        </p:txBody>
+      </p:sp>
+    </p:spTree>
+  </p:cSld>
+  <p:clrMapOvr>
+    <a:masterClrMapping/>
+  </p:clrMapOvr>
+</p:sld>
+</file>
+
+<file path=ppt/slides/slide13.xml><?xml version="1.0" encoding="utf-8"?>
+<p:sld xmlns:a="http://schemas.openxmlformats.org/drawingml/2006/main" xmlns:p="http://schemas.openxmlformats.org/presentationml/2006/main" xmlns:r="http://schemas.openxmlformats.org/officeDocument/2006/relationships">
+  <p:cSld>
+    <p:spTree>
+      <p:nvGrpSpPr>
+        <p:cNvPr id="1" name=""/>
+        <p:cNvGrpSpPr/>
+        <p:nvPr/>
+      </p:nvGrpSpPr>
+      <p:grpSpPr/>
+      <p:sp>
+        <p:nvSpPr>
+          <p:cNvPr id="2" name="TextBox 1"/>
+          <p:cNvSpPr txBox="1"/>
+          <p:nvPr/>
+        </p:nvSpPr>
+        <p:spPr>
+          <a:xfrm>
+            <a:off x="457200" y="320040"/>
+            <a:ext cx="8229600" cy="822960"/>
+          </a:xfrm>
+          <a:prstGeom prst="rect">
+            <a:avLst/>
+          </a:prstGeom>
+          <a:noFill/>
+        </p:spPr>
+        <p:txBody>
+          <a:bodyPr wrap="square">
+            <a:spAutoFit/>
+          </a:bodyPr>
+          <a:lstStyle/>
+          <a:p>
+            <a:r>
+              <a:rPr sz="2600" b="1">
+                <a:solidFill>
+                  <a:srgbClr val="0B3D2E"/>
+                </a:solidFill>
+              </a:rPr>
+              <a:t>⚠️ Errores comunes</a:t>
+            </a:r>
+          </a:p>
+        </p:txBody>
+      </p:sp>
+      <p:sp>
+        <p:nvSpPr>
+          <p:cNvPr id="3" name="TextBox 2"/>
+          <p:cNvSpPr txBox="1"/>
+          <p:nvPr/>
+        </p:nvSpPr>
+        <p:spPr>
+          <a:xfrm>
+            <a:off x="457200" y="1280160"/>
+            <a:ext cx="8229600" cy="4937760"/>
+          </a:xfrm>
+          <a:prstGeom prst="rect">
+            <a:avLst/>
+          </a:prstGeom>
+          <a:noFill/>
+        </p:spPr>
+        <p:txBody>
+          <a:bodyPr wrap="square">
+            <a:spAutoFit/>
+          </a:bodyPr>
+          <a:lstStyle/>
+          <a:p>
+            <a:pPr>
+              <a:spcAft>
+                <a:spcPts val="600"/>
+              </a:spcAft>
+            </a:pPr>
+            <a:r>
+              <a:rPr sz="1500">
+                <a:solidFill>
+                  <a:srgbClr val="22282E"/>
+                </a:solidFill>
+              </a:rPr>
+              <a:t>•  "Mi modelo es seguro porque tiene buena accuracy" — Accuracy ≠ robustez. Mide desempeño bajo ataque, no solo en test limpio.</a:t>
+            </a:r>
+          </a:p>
+          <a:p>
+            <a:pPr>
+              <a:spcAft>
+                <a:spcPts val="600"/>
+              </a:spcAft>
+            </a:pPr>
+            <a:r>
+              <a:rPr sz="1500">
+                <a:solidFill>
+                  <a:srgbClr val="22282E"/>
+                </a:solidFill>
+              </a:rPr>
+              <a:t>•  Tratar la IA como software normal en el threat model — Faltan datos y entrenamiento como activos. Modela el ciclo de vida completo, no solo la API.</a:t>
+            </a:r>
+          </a:p>
+          <a:p>
+            <a:pPr>
+              <a:spcAft>
+                <a:spcPts val="600"/>
+              </a:spcAft>
+            </a:pPr>
+            <a:r>
+              <a:rPr sz="1500">
+                <a:solidFill>
+                  <a:srgbClr val="22282E"/>
+                </a:solidFill>
+              </a:rPr>
+              <a:t>•  Ignorar la cadena de suministro — Datasets/modelos de terceros heredan puertas traseras. Añade un AI-BOM.</a:t>
+            </a:r>
+          </a:p>
+          <a:p>
+            <a:pPr>
+              <a:spcAft>
+                <a:spcPts val="600"/>
+              </a:spcAft>
+            </a:pPr>
+            <a:r>
+              <a:rPr sz="1500">
+                <a:solidFill>
+                  <a:srgbClr val="22282E"/>
+                </a:solidFill>
+              </a:rPr>
+              <a:t>•  Confundir caja blanca y negra — Suponer acceso a gradientes que no existe. Define primero el nivel de acceso del atacante.</a:t>
+            </a:r>
+          </a:p>
+          <a:p>
+            <a:pPr>
+              <a:spcAft>
+                <a:spcPts val="600"/>
+              </a:spcAft>
+            </a:pPr>
+            <a:r>
+              <a:rPr sz="1500">
+                <a:solidFill>
+                  <a:srgbClr val="22282E"/>
+                </a:solidFill>
+              </a:rPr>
+              <a:t>•  Usar solo un marco — ATLAS describe amenazas; NIST AI RMF gestiona riesgo. Se complementan, no compiten.</a:t>
+            </a:r>
+          </a:p>
+        </p:txBody>
+      </p:sp>
+    </p:spTree>
+  </p:cSld>
+  <p:clrMapOvr>
+    <a:masterClrMapping/>
+  </p:clrMapOvr>
+</p:sld>
+</file>
+
+<file path=ppt/slides/slide14.xml><?xml version="1.0" encoding="utf-8"?>
+<p:sld xmlns:a="http://schemas.openxmlformats.org/drawingml/2006/main" xmlns:p="http://schemas.openxmlformats.org/presentationml/2006/main" xmlns:r="http://schemas.openxmlformats.org/officeDocument/2006/relationships">
+  <p:cSld>
+    <p:spTree>
+      <p:nvGrpSpPr>
+        <p:cNvPr id="1" name=""/>
+        <p:cNvGrpSpPr/>
+        <p:nvPr/>
+      </p:nvGrpSpPr>
+      <p:grpSpPr/>
+      <p:sp>
+        <p:nvSpPr>
+          <p:cNvPr id="2" name="TextBox 1"/>
+          <p:cNvSpPr txBox="1"/>
+          <p:nvPr/>
+        </p:nvSpPr>
+        <p:spPr>
+          <a:xfrm>
+            <a:off x="457200" y="320040"/>
+            <a:ext cx="8229600" cy="822960"/>
+          </a:xfrm>
+          <a:prstGeom prst="rect">
+            <a:avLst/>
+          </a:prstGeom>
+          <a:noFill/>
+        </p:spPr>
+        <p:txBody>
+          <a:bodyPr wrap="square">
+            <a:spAutoFit/>
+          </a:bodyPr>
+          <a:lstStyle/>
+          <a:p>
+            <a:r>
+              <a:rPr sz="2600" b="1">
+                <a:solidFill>
+                  <a:srgbClr val="0B3D2E"/>
+                </a:solidFill>
+              </a:rPr>
+              <a:t>❓ Preguntas frecuentes</a:t>
+            </a:r>
+          </a:p>
+        </p:txBody>
+      </p:sp>
+      <p:sp>
+        <p:nvSpPr>
+          <p:cNvPr id="3" name="TextBox 2"/>
+          <p:cNvSpPr txBox="1"/>
+          <p:nvPr/>
+        </p:nvSpPr>
+        <p:spPr>
+          <a:xfrm>
+            <a:off x="457200" y="1280160"/>
+            <a:ext cx="8229600" cy="4937760"/>
+          </a:xfrm>
+          <a:prstGeom prst="rect">
+            <a:avLst/>
+          </a:prstGeom>
+          <a:noFill/>
+        </p:spPr>
+        <p:txBody>
+          <a:bodyPr wrap="square">
+            <a:spAutoFit/>
+          </a:bodyPr>
+          <a:lstStyle/>
+          <a:p>
+            <a:pPr>
+              <a:spcAft>
+                <a:spcPts val="600"/>
+              </a:spcAft>
+            </a:pPr>
+            <a:r>
+              <a:rPr sz="1500">
+                <a:solidFill>
+                  <a:srgbClr val="22282E"/>
+                </a:solidFill>
+              </a:rPr>
+              <a:t>•  ❓ ¿En qué se diferencia la seguridad de IA de la seguridad de software tradicional?</a:t>
+            </a:r>
+          </a:p>
+          <a:p>
+            <a:pPr>
+              <a:spcAft>
+                <a:spcPts val="600"/>
+              </a:spcAft>
+            </a:pPr>
+            <a:r>
+              <a:rPr sz="1500">
+                <a:solidFill>
+                  <a:srgbClr val="22282E"/>
+                </a:solidFill>
+              </a:rPr>
+              <a:t>•  Añade dos activos nuevos —los datos de entrenamiento y el modelo aprendido— y ataques que explotan el comportamiento estadístico del modelo, no bugs de código. El pipeline de datos pasa a ser código…</a:t>
+            </a:r>
+          </a:p>
+          <a:p>
+            <a:pPr>
+              <a:spcAft>
+                <a:spcPts val="600"/>
+              </a:spcAft>
+            </a:pPr>
+            <a:r>
+              <a:rPr sz="1500">
+                <a:solidFill>
+                  <a:srgbClr val="22282E"/>
+                </a:solidFill>
+              </a:rPr>
+              <a:t>•  ❓ ¿MITRE ATLAS reemplaza a ATT&amp;CK?</a:t>
+            </a:r>
+          </a:p>
+          <a:p>
+            <a:pPr>
+              <a:spcAft>
+                <a:spcPts val="600"/>
+              </a:spcAft>
+            </a:pPr>
+            <a:r>
+              <a:rPr sz="1500">
+                <a:solidFill>
+                  <a:srgbClr val="22282E"/>
+                </a:solidFill>
+              </a:rPr>
+              <a:t>•  No. ATLAS es un complemento centrado en sistemas de IA; muchas cadenas reales combinan técnicas de ATT&amp;CK (acceso inicial) con técnicas de ATLAS (evasión o envenenamiento del modelo).</a:t>
+            </a:r>
+          </a:p>
+          <a:p>
+            <a:pPr>
+              <a:spcAft>
+                <a:spcPts val="600"/>
+              </a:spcAft>
+            </a:pPr>
+            <a:r>
+              <a:rPr sz="1500">
+                <a:solidFill>
+                  <a:srgbClr val="22282E"/>
+                </a:solidFill>
+              </a:rPr>
+              <a:t>•  ❓ ¿Necesito ser experto en ML para hacer seguridad de IA?</a:t>
+            </a:r>
+          </a:p>
+          <a:p>
+            <a:pPr>
+              <a:spcAft>
+                <a:spcPts val="600"/>
+              </a:spcAft>
+            </a:pPr>
+            <a:r>
+              <a:rPr sz="1500">
+                <a:solidFill>
+                  <a:srgbClr val="22282E"/>
+                </a:solidFill>
+              </a:rPr>
+              <a:t>•  Ayuda, pero no es imprescindible al inicio. Muchos ataques a LLM son de caja negra y se parecen a AppSec. Los ataques adversariales sí requieren entender gradientes y entrenamiento.</a:t>
+            </a:r>
+          </a:p>
+          <a:p>
+            <a:pPr>
+              <a:spcAft>
+                <a:spcPts val="600"/>
+              </a:spcAft>
+            </a:pPr>
+            <a:r>
+              <a:rPr sz="1500">
+                <a:solidFill>
+                  <a:srgbClr val="22282E"/>
+                </a:solidFill>
+              </a:rPr>
+              <a:t>•  ❓ ¿El NIST AI RMF es obligatorio?</a:t>
+            </a:r>
+          </a:p>
+        </p:txBody>
+      </p:sp>
+    </p:spTree>
+  </p:cSld>
+  <p:clrMapOvr>
+    <a:masterClrMapping/>
+  </p:clrMapOvr>
+</p:sld>
+</file>
+
+<file path=ppt/slides/slide15.xml><?xml version="1.0" encoding="utf-8"?>
+<p:sld xmlns:a="http://schemas.openxmlformats.org/drawingml/2006/main" xmlns:p="http://schemas.openxmlformats.org/presentationml/2006/main" xmlns:r="http://schemas.openxmlformats.org/officeDocument/2006/relationships">
+  <p:cSld>
+    <p:spTree>
+      <p:nvGrpSpPr>
+        <p:cNvPr id="1" name=""/>
+        <p:cNvGrpSpPr/>
+        <p:nvPr/>
+      </p:nvGrpSpPr>
+      <p:grpSpPr/>
+      <p:sp>
+        <p:nvSpPr>
+          <p:cNvPr id="2" name="TextBox 1"/>
+          <p:cNvSpPr txBox="1"/>
+          <p:nvPr/>
+        </p:nvSpPr>
+        <p:spPr>
+          <a:xfrm>
+            <a:off x="457200" y="320040"/>
+            <a:ext cx="8229600" cy="822960"/>
+          </a:xfrm>
+          <a:prstGeom prst="rect">
+            <a:avLst/>
+          </a:prstGeom>
+          <a:noFill/>
+        </p:spPr>
+        <p:txBody>
+          <a:bodyPr wrap="square">
+            <a:spAutoFit/>
+          </a:bodyPr>
+          <a:lstStyle/>
+          <a:p>
+            <a:r>
+              <a:rPr sz="2600" b="1">
+                <a:solidFill>
+                  <a:srgbClr val="0B3D2E"/>
+                </a:solidFill>
+              </a:rPr>
+              <a:t>🔗 Referencias</a:t>
+            </a:r>
+          </a:p>
+        </p:txBody>
+      </p:sp>
+      <p:sp>
+        <p:nvSpPr>
+          <p:cNvPr id="3" name="TextBox 2"/>
+          <p:cNvSpPr txBox="1"/>
+          <p:nvPr/>
+        </p:nvSpPr>
+        <p:spPr>
+          <a:xfrm>
+            <a:off x="457200" y="1280160"/>
+            <a:ext cx="8229600" cy="4937760"/>
+          </a:xfrm>
+          <a:prstGeom prst="rect">
+            <a:avLst/>
+          </a:prstGeom>
+          <a:noFill/>
+        </p:spPr>
+        <p:txBody>
+          <a:bodyPr wrap="square">
+            <a:spAutoFit/>
+          </a:bodyPr>
+          <a:lstStyle/>
+          <a:p>
+            <a:pPr>
+              <a:spcAft>
+                <a:spcPts val="600"/>
+              </a:spcAft>
+            </a:pPr>
+            <a:r>
+              <a:rPr sz="1500">
+                <a:solidFill>
+                  <a:srgbClr val="22282E"/>
+                </a:solidFill>
+              </a:rPr>
               <a:t>•  NIST AI Risk Management Framework 1.0 — &lt;https://www.nist.gov/itl/ai-risk-management-framework&gt;</a:t>
             </a:r>
           </a:p>
@@ -3629,6 +4080,81 @@
           </a:p>
         </p:txBody>
       </p:sp>
+    </p:spTree>
+  </p:cSld>
+  <p:clrMapOvr>
+    <a:masterClrMapping/>
+  </p:clrMapOvr>
+</p:sld>
+</file>
+
+<file path=ppt/slides/slide16.xml><?xml version="1.0" encoding="utf-8"?>
+<p:sld xmlns:a="http://schemas.openxmlformats.org/drawingml/2006/main" xmlns:p="http://schemas.openxmlformats.org/presentationml/2006/main" xmlns:r="http://schemas.openxmlformats.org/officeDocument/2006/relationships">
+  <p:cSld>
+    <p:spTree>
+      <p:nvGrpSpPr>
+        <p:cNvPr id="1" name=""/>
+        <p:cNvGrpSpPr/>
+        <p:nvPr/>
+      </p:nvGrpSpPr>
+      <p:grpSpPr/>
+      <p:sp>
+        <p:nvSpPr>
+          <p:cNvPr id="2" name="TextBox 1"/>
+          <p:cNvSpPr txBox="1"/>
+          <p:nvPr/>
+        </p:nvSpPr>
+        <p:spPr>
+          <a:xfrm>
+            <a:off x="457200" y="274320"/>
+            <a:ext cx="8229600" cy="640080"/>
+          </a:xfrm>
+          <a:prstGeom prst="rect">
+            <a:avLst/>
+          </a:prstGeom>
+          <a:noFill/>
+        </p:spPr>
+        <p:txBody>
+          <a:bodyPr wrap="square">
+            <a:spAutoFit/>
+          </a:bodyPr>
+          <a:lstStyle/>
+          <a:p>
+            <a:r>
+              <a:rPr sz="2200" b="1">
+                <a:solidFill>
+                  <a:srgbClr val="0B3D2E"/>
+                </a:solidFill>
+              </a:rPr>
+              <a:t>Diagrama de la clase</a:t>
+            </a:r>
+          </a:p>
+        </p:txBody>
+      </p:sp>
+      <p:pic>
+        <p:nvPicPr>
+          <p:cNvPr id="3" name="Picture 2" descr="2a491feda10d1702.png"/>
+          <p:cNvPicPr>
+            <a:picLocks noChangeAspect="1"/>
+          </p:cNvPicPr>
+          <p:nvPr/>
+        </p:nvPicPr>
+        <p:blipFill>
+          <a:blip r:embed="rId2"/>
+          <a:stretch>
+            <a:fillRect/>
+          </a:stretch>
+        </p:blipFill>
+        <p:spPr>
+          <a:xfrm>
+            <a:off x="457200" y="3281449"/>
+            <a:ext cx="8229600" cy="935181"/>
+          </a:xfrm>
+          <a:prstGeom prst="rect">
+            <a:avLst/>
+          </a:prstGeom>
+        </p:spPr>
+      </p:pic>
     </p:spTree>
   </p:cSld>
   <p:clrMapOvr>
@@ -3713,7 +4239,7 @@
                   <a:srgbClr val="22282E"/>
                 </a:solidFill>
               </a:rPr>
-              <a:t>•  Construir el mapa mental de la seguridad de la IA: entender por qué un sistema de machine learning tiene una superficie de ataque propia, distinta de la del software tradicional, y aprender a describir esa superficie con marcos estándar (MITRE ATLAS y NIST AI RMF). Al terminar, el alumno sabrá situar cualquier amenaza de las clases siguientes dentro del ciclo de vida datos → entrenamiento → modelo → despliegue → inferencia.</a:t>
+              <a:t>•  Construir el mapa mental de la seguridad de la IA: entender por qué un sistema de machine learning tiene una superficie de ataque propia, distinta de la del software tradicional, y aprender a…</a:t>
             </a:r>
           </a:p>
         </p:txBody>
@@ -4107,7 +4633,7 @@
                   <a:srgbClr val="0B3D2E"/>
                 </a:solidFill>
               </a:rPr>
-              <a:t>📖 Definiciones y características</a:t>
+              <a:t>🧠 Explicación en profundidad</a:t>
             </a:r>
           </a:p>
         </p:txBody>
@@ -4145,97 +4671,37 @@
                   <a:srgbClr val="22282E"/>
                 </a:solidFill>
               </a:rPr>
-              <a:t>•  Superficie de ataque de IA: conjunto de puntos donde un adversario puede influir en datos, entrenamiento, modelo o inferencia. Característica: se extiende a la cadena de suministro (datasets y modelos preentrenados de terceros).</a:t>
-            </a:r>
-          </a:p>
-          <a:p>
-            <a:pPr>
-              <a:spcAft>
-                <a:spcPts val="600"/>
-              </a:spcAft>
-            </a:pPr>
-            <a:r>
-              <a:rPr sz="1500">
-                <a:solidFill>
-                  <a:srgbClr val="22282E"/>
-                </a:solidFill>
-              </a:rPr>
-              <a:t>•  Ataque de caja blanca: el atacante conoce arquitectura, pesos y gradientes. Característica: permite ataques óptimos (p. ej. basados en gradiente) y sirve como peor caso en la evaluación.</a:t>
-            </a:r>
-          </a:p>
-          <a:p>
-            <a:pPr>
-              <a:spcAft>
-                <a:spcPts val="600"/>
-              </a:spcAft>
-            </a:pPr>
-            <a:r>
-              <a:rPr sz="1500">
-                <a:solidFill>
-                  <a:srgbClr val="22282E"/>
-                </a:solidFill>
-              </a:rPr>
-              <a:t>•  Ataque de caja negra: solo hay acceso a entradas/salidas (la API). Característica: usa consultas repetidas, transferibilidad o modelos sustitutos.</a:t>
-            </a:r>
-          </a:p>
-          <a:p>
-            <a:pPr>
-              <a:spcAft>
-                <a:spcPts val="600"/>
-              </a:spcAft>
-            </a:pPr>
-            <a:r>
-              <a:rPr sz="1500">
-                <a:solidFill>
-                  <a:srgbClr val="22282E"/>
-                </a:solidFill>
-              </a:rPr>
-              <a:t>•  MITRE ATLAS: base de conocimiento de tácticas (Reconnaissance, Resource Development, Initial Access, ML Model Access, Exfiltration, Impact...) y técnicas contra sistemas de IA, homóloga de ATT&amp;CK.</a:t>
-            </a:r>
-          </a:p>
-          <a:p>
-            <a:pPr>
-              <a:spcAft>
-                <a:spcPts val="600"/>
-              </a:spcAft>
-            </a:pPr>
-            <a:r>
-              <a:rPr sz="1500">
-                <a:solidFill>
-                  <a:srgbClr val="22282E"/>
-                </a:solidFill>
-              </a:rPr>
-              <a:t>•  NIST AI RMF: marco voluntario con cuatro funciones —Govern, Map, Measure, Manage— para gestionar riesgos de IA a lo largo del ciclo de vida.</a:t>
-            </a:r>
-          </a:p>
-          <a:p>
-            <a:pPr>
-              <a:spcAft>
-                <a:spcPts val="600"/>
-              </a:spcAft>
-            </a:pPr>
-            <a:r>
-              <a:rPr sz="1500">
-                <a:solidFill>
-                  <a:srgbClr val="22282E"/>
-                </a:solidFill>
-              </a:rPr>
-              <a:t>•  AI-BOM: inventario de datos, modelos, dependencias y procedencia de un sistema de IA; base para gestionar riesgo de cadena de suministro.</a:t>
-            </a:r>
-          </a:p>
-          <a:p>
-            <a:pPr>
-              <a:spcAft>
-                <a:spcPts val="600"/>
-              </a:spcAft>
-            </a:pPr>
-            <a:r>
-              <a:rPr sz="1500">
-                <a:solidFill>
-                  <a:srgbClr val="22282E"/>
-                </a:solidFill>
-              </a:rPr>
-              <a:t>•  Robustez vs. seguridad: robustez es resistir perturbaciones (adversariales o no); seguridad es resistir a un adversario con intención. No son sinónimos.</a:t>
+              <a:t>•  El riesgo de IA abarca datos, modelo, aplicación, infraestructura, usuarios y efectos. Seguridad del modelo y uso seguro no son equivalentes: un modelo robusto puede revelar datos por una integración…</a:t>
+            </a:r>
+          </a:p>
+          <a:p>
+            <a:pPr>
+              <a:spcAft>
+                <a:spcPts val="600"/>
+              </a:spcAft>
+            </a:pPr>
+            <a:r>
+              <a:rPr sz="1500">
+                <a:solidFill>
+                  <a:srgbClr val="22282E"/>
+                </a:solidFill>
+              </a:rPr>
+              <a:t>•  El diagrama debe leerse como una cadena de supuestos: verificar un nodo no demuestra los siguientes. La evaluación declara actor, acceso, datos, métrica, umbral y consecuencia; compara una línea base…</a:t>
+            </a:r>
+          </a:p>
+          <a:p>
+            <a:pPr>
+              <a:spcAft>
+                <a:spcPts val="600"/>
+              </a:spcAft>
+            </a:pPr>
+            <a:r>
+              <a:rPr sz="1500">
+                <a:solidFill>
+                  <a:srgbClr val="22282E"/>
+                </a:solidFill>
+              </a:rPr>
+              <a:t>•  Un clasificador preciso falla sobre un grupo no representado. El equipo separa error de calidad, abuso deliberado e impacto de negocio antes de elegir control.</a:t>
             </a:r>
           </a:p>
         </p:txBody>
@@ -4286,7 +4752,7 @@
                   <a:srgbClr val="0B3D2E"/>
                 </a:solidFill>
               </a:rPr>
-              <a:t>🧰 Herramientas y preparación</a:t>
+              <a:t>📔 Glosario operativo</a:t>
             </a:r>
           </a:p>
         </p:txBody>
@@ -4324,82 +4790,52 @@
                   <a:srgbClr val="22282E"/>
                 </a:solidFill>
               </a:rPr>
-              <a:t>•  Trabajaremos en un laboratorio aislado (VM o contenedor) sin datos reales de producción.</a:t>
-            </a:r>
-          </a:p>
-          <a:p>
-            <a:pPr>
-              <a:spcAft>
-                <a:spcPts val="600"/>
-              </a:spcAft>
-            </a:pPr>
-            <a:r>
-              <a:rPr sz="1500">
-                <a:solidFill>
-                  <a:srgbClr val="22282E"/>
-                </a:solidFill>
-              </a:rPr>
-              <a:t>•  python -m venv .venv &amp;&amp; source .venv/bin/activate   # Windows: .venv\Scripts\activate</a:t>
-            </a:r>
-          </a:p>
-          <a:p>
-            <a:pPr>
-              <a:spcAft>
-                <a:spcPts val="600"/>
-              </a:spcAft>
-            </a:pPr>
-            <a:r>
-              <a:rPr sz="1500">
-                <a:solidFill>
-                  <a:srgbClr val="22282E"/>
-                </a:solidFill>
-              </a:rPr>
-              <a:t>•  pip install adversarial-robustness-toolbox torch torchvision scikit-learn numpy</a:t>
-            </a:r>
-          </a:p>
-          <a:p>
-            <a:pPr>
-              <a:spcAft>
-                <a:spcPts val="600"/>
-              </a:spcAft>
-            </a:pPr>
-            <a:r>
-              <a:rPr sz="1500">
-                <a:solidFill>
-                  <a:srgbClr val="22282E"/>
-                </a:solidFill>
-              </a:rPr>
-              <a:t>•  MITRE ATLAS Navigator (web) para explorar la matriz: &lt;https://atlas.mitre.org/&gt;</a:t>
-            </a:r>
-          </a:p>
-          <a:p>
-            <a:pPr>
-              <a:spcAft>
-                <a:spcPts val="600"/>
-              </a:spcAft>
-            </a:pPr>
-            <a:r>
-              <a:rPr sz="1500">
-                <a:solidFill>
-                  <a:srgbClr val="22282E"/>
-                </a:solidFill>
-              </a:rPr>
-              <a:t>•  NIST AI RMF Playbook para consultar acciones sugeridas por función.</a:t>
-            </a:r>
-          </a:p>
-          <a:p>
-            <a:pPr>
-              <a:spcAft>
-                <a:spcPts val="600"/>
-              </a:spcAft>
-            </a:pPr>
-            <a:r>
-              <a:rPr sz="1500">
-                <a:solidFill>
-                  <a:srgbClr val="22282E"/>
-                </a:solidFill>
-              </a:rPr>
-              <a:t>•  Un modelo de juguete (por ejemplo un clasificador sobre MNIST o CIFAR-10) que usaremos en clases siguientes.</a:t>
+              <a:t>•  Término — Definición</a:t>
+            </a:r>
+          </a:p>
+          <a:p>
+            <a:pPr>
+              <a:spcAft>
+                <a:spcPts val="600"/>
+              </a:spcAft>
+            </a:pPr>
+            <a:r>
+              <a:rPr sz="1500">
+                <a:solidFill>
+                  <a:srgbClr val="22282E"/>
+                </a:solidFill>
+              </a:rPr>
+              <a:t>•  Activo de IA — Componente o resultado cuyo daño importa.</a:t>
+            </a:r>
+          </a:p>
+          <a:p>
+            <a:pPr>
+              <a:spcAft>
+                <a:spcPts val="600"/>
+              </a:spcAft>
+            </a:pPr>
+            <a:r>
+              <a:rPr sz="1500">
+                <a:solidFill>
+                  <a:srgbClr val="22282E"/>
+                </a:solidFill>
+              </a:rPr>
+              <a:t>•  Evaluación — Experimento reproducible ligado a un riesgo y criterio.</a:t>
+            </a:r>
+          </a:p>
+          <a:p>
+            <a:pPr>
+              <a:spcAft>
+                <a:spcPts val="600"/>
+              </a:spcAft>
+            </a:pPr>
+            <a:r>
+              <a:rPr sz="1500">
+                <a:solidFill>
+                  <a:srgbClr val="22282E"/>
+                </a:solidFill>
+              </a:rPr>
+              <a:t>•  Riesgo residual — Exposición que permanece tras controles.</a:t>
             </a:r>
           </a:p>
         </p:txBody>
@@ -4450,7 +4886,7 @@
                   <a:srgbClr val="0B3D2E"/>
                 </a:solidFill>
               </a:rPr>
-              <a:t>🧪 Laboratorio guiado</a:t>
+              <a:t>✅ Criterio de dominio</a:t>
             </a:r>
           </a:p>
         </p:txBody>
@@ -4488,97 +4924,7 @@
                   <a:srgbClr val="22282E"/>
                 </a:solidFill>
               </a:rPr>
-              <a:t>•  Este laboratorio es de modelado, no de explotación; aún así, cualquier prueba se hace sobre modelos y datos propios.</a:t>
-            </a:r>
-          </a:p>
-          <a:p>
-            <a:pPr>
-              <a:spcAft>
-                <a:spcPts val="600"/>
-              </a:spcAft>
-            </a:pPr>
-            <a:r>
-              <a:rPr sz="1500">
-                <a:solidFill>
-                  <a:srgbClr val="22282E"/>
-                </a:solidFill>
-              </a:rPr>
-              <a:t>•  Elige un sistema de referencia. Toma un caso realista, p. ej. "API de scoring de crédito basada en un modelo de scikit-learn" o "chatbot de soporte con un LLM". Descríbelo en una frase.</a:t>
-            </a:r>
-          </a:p>
-          <a:p>
-            <a:pPr>
-              <a:spcAft>
-                <a:spcPts val="600"/>
-              </a:spcAft>
-            </a:pPr>
-            <a:r>
-              <a:rPr sz="1500">
-                <a:solidFill>
-                  <a:srgbClr val="22282E"/>
-                </a:solidFill>
-              </a:rPr>
-              <a:t>•  Dibuja el ciclo de vida. En un diagrama, enumera las cinco fases: recolección de datos, entrenamiento, empaquetado del modelo, despliegue (API), inferencia. Para cada una, anota una entrada de datos y un actor con acceso.</a:t>
-            </a:r>
-          </a:p>
-          <a:p>
-            <a:pPr>
-              <a:spcAft>
-                <a:spcPts val="600"/>
-              </a:spcAft>
-            </a:pPr>
-            <a:r>
-              <a:rPr sz="1500">
-                <a:solidFill>
-                  <a:srgbClr val="22282E"/>
-                </a:solidFill>
-              </a:rPr>
-              <a:t>•  Enumera activos y propiedades CIA. Por cada activo (dataset, pesos del modelo, API, prompts del sistema) marca qué te importa: confidencialidad (¿se puede robar el modelo?), integridad (¿se puede sesgar?), disponibilidad (¿se puede degradar con entradas costosas?).</a:t>
-            </a:r>
-          </a:p>
-          <a:p>
-            <a:pPr>
-              <a:spcAft>
-                <a:spcPts val="600"/>
-              </a:spcAft>
-            </a:pPr>
-            <a:r>
-              <a:rPr sz="1500">
-                <a:solidFill>
-                  <a:srgbClr val="22282E"/>
-                </a:solidFill>
-              </a:rPr>
-              <a:t>•  Mapea a MITRE ATLAS. Abre el Navigator y localiza técnicas aplicables: por ejemplo "Evade ML Model", "Poison Training Data", "Exfiltrate via ML Inference API". Anota los IDs.</a:t>
-            </a:r>
-          </a:p>
-          <a:p>
-            <a:pPr>
-              <a:spcAft>
-                <a:spcPts val="600"/>
-              </a:spcAft>
-            </a:pPr>
-            <a:r>
-              <a:rPr sz="1500">
-                <a:solidFill>
-                  <a:srgbClr val="22282E"/>
-                </a:solidFill>
-              </a:rPr>
-              <a:t>•  Clasifica al atacante. Para cada amenaza, decide si requiere caja blanca o negra y qué nivel de acceso (usuario de la API, insider del pipeline, proveedor del dataset).</a:t>
-            </a:r>
-          </a:p>
-          <a:p>
-            <a:pPr>
-              <a:spcAft>
-                <a:spcPts val="600"/>
-              </a:spcAft>
-            </a:pPr>
-            <a:r>
-              <a:rPr sz="1500">
-                <a:solidFill>
-                  <a:srgbClr val="22282E"/>
-                </a:solidFill>
-              </a:rPr>
-              <a:t>•  Cruza con NIST AI RMF. Asigna cada riesgo a una función: Map (identificar contexto), Measure (métrica de robustez), Manage (control/mitigación), Govern (política/rol responsable).</a:t>
+              <a:t>•  El alumno demuestra dominio cuando formula un escenario específico, reproduce evidencia, explica límites y diseña controles técnicos y de gobierno sin atribuir certeza al modelo.</a:t>
             </a:r>
           </a:p>
         </p:txBody>
@@ -4629,7 +4975,7 @@
                   <a:srgbClr val="0B3D2E"/>
                 </a:solidFill>
               </a:rPr>
-              <a:t>✍️ Ejercicios</a:t>
+              <a:t>📖 Definiciones y características</a:t>
             </a:r>
           </a:p>
         </p:txBody>
@@ -4667,82 +5013,97 @@
                   <a:srgbClr val="22282E"/>
                 </a:solidFill>
               </a:rPr>
-              <a:t>•  Para un filtro de spam, lista tres ataques distintos y ubícalos en el ciclo de vida.</a:t>
-            </a:r>
-          </a:p>
-          <a:p>
-            <a:pPr>
-              <a:spcAft>
-                <a:spcPts val="600"/>
-              </a:spcAft>
-            </a:pPr>
-            <a:r>
-              <a:rPr sz="1500">
-                <a:solidFill>
-                  <a:srgbClr val="22282E"/>
-                </a:solidFill>
-              </a:rPr>
-              <a:t>•  Explica con un ejemplo por qué la transferibilidad hace peligrosos los ataques de caja negra.</a:t>
-            </a:r>
-          </a:p>
-          <a:p>
-            <a:pPr>
-              <a:spcAft>
-                <a:spcPts val="600"/>
-              </a:spcAft>
-            </a:pPr>
-            <a:r>
-              <a:rPr sz="1500">
-                <a:solidFill>
-                  <a:srgbClr val="22282E"/>
-                </a:solidFill>
-              </a:rPr>
-              <a:t>•  Localiza en ATLAS un caso de estudio real (case study) y resume su cadena de ataque en 4 pasos.</a:t>
-            </a:r>
-          </a:p>
-          <a:p>
-            <a:pPr>
-              <a:spcAft>
-                <a:spcPts val="600"/>
-              </a:spcAft>
-            </a:pPr>
-            <a:r>
-              <a:rPr sz="1500">
-                <a:solidFill>
-                  <a:srgbClr val="22282E"/>
-                </a:solidFill>
-              </a:rPr>
-              <a:t>•  Redacta, para el caso "chatbot con LLM", una entrada de riesgo con las cuatro funciones del AI RMF cubiertas.</a:t>
-            </a:r>
-          </a:p>
-          <a:p>
-            <a:pPr>
-              <a:spcAft>
-                <a:spcPts val="600"/>
-              </a:spcAft>
-            </a:pPr>
-            <a:r>
-              <a:rPr sz="1500">
-                <a:solidFill>
-                  <a:srgbClr val="22282E"/>
-                </a:solidFill>
-              </a:rPr>
-              <a:t>•  Construye un AI-BOM mínimo (5 filas) para un modelo que usa un dataset público y un modelo preentrenado de Hugging Face.</a:t>
-            </a:r>
-          </a:p>
-          <a:p>
-            <a:pPr>
-              <a:spcAft>
-                <a:spcPts val="600"/>
-              </a:spcAft>
-            </a:pPr>
-            <a:r>
-              <a:rPr sz="1500">
-                <a:solidFill>
-                  <a:srgbClr val="22282E"/>
-                </a:solidFill>
-              </a:rPr>
-              <a:t>•  Diferencia con ejemplos "robustez", "seguridad" y "safety" para un coche autónomo.</a:t>
+              <a:t>•  Superficie de ataque de IA: conjunto de puntos donde un adversario puede influir en datos, entrenamiento, modelo o inferencia. Característica: se extiende a la cadena de suministro (datasets y…</a:t>
+            </a:r>
+          </a:p>
+          <a:p>
+            <a:pPr>
+              <a:spcAft>
+                <a:spcPts val="600"/>
+              </a:spcAft>
+            </a:pPr>
+            <a:r>
+              <a:rPr sz="1500">
+                <a:solidFill>
+                  <a:srgbClr val="22282E"/>
+                </a:solidFill>
+              </a:rPr>
+              <a:t>•  Ataque de caja blanca: el atacante conoce arquitectura, pesos y gradientes. Característica: permite ataques óptimos (p. ej. basados en gradiente) y sirve como peor caso en la evaluación.</a:t>
+            </a:r>
+          </a:p>
+          <a:p>
+            <a:pPr>
+              <a:spcAft>
+                <a:spcPts val="600"/>
+              </a:spcAft>
+            </a:pPr>
+            <a:r>
+              <a:rPr sz="1500">
+                <a:solidFill>
+                  <a:srgbClr val="22282E"/>
+                </a:solidFill>
+              </a:rPr>
+              <a:t>•  Ataque de caja negra: solo hay acceso a entradas/salidas (la API). Característica: usa consultas repetidas, transferibilidad o modelos sustitutos.</a:t>
+            </a:r>
+          </a:p>
+          <a:p>
+            <a:pPr>
+              <a:spcAft>
+                <a:spcPts val="600"/>
+              </a:spcAft>
+            </a:pPr>
+            <a:r>
+              <a:rPr sz="1500">
+                <a:solidFill>
+                  <a:srgbClr val="22282E"/>
+                </a:solidFill>
+              </a:rPr>
+              <a:t>•  MITRE ATLAS: base de conocimiento de tácticas (Reconnaissance, Resource Development, Initial Access, ML Model Access, Exfiltration, Impact...) y técnicas contra sistemas de IA, homóloga de ATT&amp;CK.</a:t>
+            </a:r>
+          </a:p>
+          <a:p>
+            <a:pPr>
+              <a:spcAft>
+                <a:spcPts val="600"/>
+              </a:spcAft>
+            </a:pPr>
+            <a:r>
+              <a:rPr sz="1500">
+                <a:solidFill>
+                  <a:srgbClr val="22282E"/>
+                </a:solidFill>
+              </a:rPr>
+              <a:t>•  NIST AI RMF: marco voluntario con cuatro funciones —Govern, Map, Measure, Manage— para gestionar riesgos de IA a lo largo del ciclo de vida.</a:t>
+            </a:r>
+          </a:p>
+          <a:p>
+            <a:pPr>
+              <a:spcAft>
+                <a:spcPts val="600"/>
+              </a:spcAft>
+            </a:pPr>
+            <a:r>
+              <a:rPr sz="1500">
+                <a:solidFill>
+                  <a:srgbClr val="22282E"/>
+                </a:solidFill>
+              </a:rPr>
+              <a:t>•  AI-BOM: inventario de datos, modelos, dependencias y procedencia de un sistema de IA; base para gestionar riesgo de cadena de suministro.</a:t>
+            </a:r>
+          </a:p>
+          <a:p>
+            <a:pPr>
+              <a:spcAft>
+                <a:spcPts val="600"/>
+              </a:spcAft>
+            </a:pPr>
+            <a:r>
+              <a:rPr sz="1500">
+                <a:solidFill>
+                  <a:srgbClr val="22282E"/>
+                </a:solidFill>
+              </a:rPr>
+              <a:t>•  Robustez vs. seguridad: robustez es resistir perturbaciones (adversariales o no); seguridad es resistir a un adversario con intención. No son sinónimos.</a:t>
             </a:r>
           </a:p>
         </p:txBody>
@@ -4793,7 +5154,7 @@
                   <a:srgbClr val="0B3D2E"/>
                 </a:solidFill>
               </a:rPr>
-              <a:t>📝 Reto verificable</a:t>
+              <a:t>🧰 Herramientas y preparación</a:t>
             </a:r>
           </a:p>
         </p:txBody>
@@ -4831,22 +5192,52 @@
                   <a:srgbClr val="22282E"/>
                 </a:solidFill>
               </a:rPr>
-              <a:t>•  Entrega un modelo de amenazas de una página para un sistema de ML a tu elección que incluya: diagrama del ciclo de vida, tabla de activos con propiedades CIA, al menos 6 amenazas mapeadas a técnicas ATLAS (con ID), clasificación caja blanca/negra por amenaza y priorización top-3.</a:t>
-            </a:r>
-          </a:p>
-          <a:p>
-            <a:pPr>
-              <a:spcAft>
-                <a:spcPts val="600"/>
-              </a:spcAft>
-            </a:pPr>
-            <a:r>
-              <a:rPr sz="1500">
-                <a:solidFill>
-                  <a:srgbClr val="22282E"/>
-                </a:solidFill>
-              </a:rPr>
-              <a:t>•  Criterio de aceptación: cada una de las 6 amenazas tiene (a) un ID ATLAS válido, (b) la fase del ciclo de vida afectada, (c) el tipo de atacante y (d) una función del NIST AI RMF asociada. Un revisor debe poder, leyendo solo tu tabla, entender qué defenderás primero y por qué.</a:t>
+              <a:t>•  Trabajaremos en un laboratorio aislado (VM o contenedor) sin datos reales de producción.</a:t>
+            </a:r>
+          </a:p>
+          <a:p>
+            <a:pPr>
+              <a:spcAft>
+                <a:spcPts val="600"/>
+              </a:spcAft>
+            </a:pPr>
+            <a:r>
+              <a:rPr sz="1500">
+                <a:solidFill>
+                  <a:srgbClr val="22282E"/>
+                </a:solidFill>
+              </a:rPr>
+              <a:t>•  MITRE ATLAS Navigator (web) para explorar la matriz: &lt;https://atlas.mitre.org/&gt;</a:t>
+            </a:r>
+          </a:p>
+          <a:p>
+            <a:pPr>
+              <a:spcAft>
+                <a:spcPts val="600"/>
+              </a:spcAft>
+            </a:pPr>
+            <a:r>
+              <a:rPr sz="1500">
+                <a:solidFill>
+                  <a:srgbClr val="22282E"/>
+                </a:solidFill>
+              </a:rPr>
+              <a:t>•  NIST AI RMF Playbook para consultar acciones sugeridas por función.</a:t>
+            </a:r>
+          </a:p>
+          <a:p>
+            <a:pPr>
+              <a:spcAft>
+                <a:spcPts val="600"/>
+              </a:spcAft>
+            </a:pPr>
+            <a:r>
+              <a:rPr sz="1500">
+                <a:solidFill>
+                  <a:srgbClr val="22282E"/>
+                </a:solidFill>
+              </a:rPr>
+              <a:t>•  Un modelo de juguete (por ejemplo un clasificador sobre MNIST o CIFAR-10) que usaremos en clases siguientes.</a:t>
             </a:r>
           </a:p>
         </p:txBody>
